--- a/neerlandais1/powerpoints/Module_25_Hoe_laat_is_het.pptx
+++ b/neerlandais1/powerpoints/Module_25_Hoe_laat_is_het.pptx
@@ -133,18 +133,18 @@
   <p:extLst>
     <p:ext uri="{521415D9-36F7-43E2-AB2F-B90AF26B5E84}">
       <p14:sectionLst xmlns:p14="http://schemas.microsoft.com/office/powerpoint/2010/main">
-        <p14:section name="Ouverture" id="{28874b9b-f467-bc62-dd8f-7c0807d75ddc}">
+        <p14:section name="Ouverture" id="{4eccafea-c5da-2288-8da4-b45af3140601}">
           <p14:sldIdLst>
             <p14:sldId id="256"/>
           </p14:sldIdLst>
         </p14:section>
-        <p14:section name="Découvrir" id="{412e6c45-2bd4-6746-acff-6cb576411117}">
+        <p14:section name="Découvrir" id="{d1097d02-e216-d6a8-a5a2-26b944dd711c}">
           <p14:sldIdLst>
             <p14:sldId id="257"/>
             <p14:sldId id="258"/>
           </p14:sldIdLst>
         </p14:section>
-        <p14:section name="Comprendre" id="{f2b2914b-8266-6618-7a88-a155918d6b3f}">
+        <p14:section name="Comprendre" id="{fbad819d-4b1b-0b69-c265-ccb56eb36d7b}">
           <p14:sldIdLst>
             <p14:sldId id="259"/>
             <p14:sldId id="260"/>
@@ -158,7 +158,7 @@
             <p14:sldId id="268"/>
           </p14:sldIdLst>
         </p14:section>
-        <p14:section name="JIJ NU ! — Oefeningen" id="{70f5c4f5-d2ec-86e3-cab6-74f79c4d8825}">
+        <p14:section name="JIJ NU ! — Oefeningen" id="{bb01c3bd-0461-9990-82b1-63dc9dbf39d9}">
           <p14:sldIdLst>
             <p14:sldId id="269"/>
             <p14:sldId id="270"/>
@@ -175,7 +175,7 @@
             <p14:sldId id="281"/>
           </p14:sldIdLst>
         </p14:section>
-        <p14:section name="Clôture" id="{978b85d0-9993-b3f7-e207-17fbe63630a4}">
+        <p14:section name="Clôture" id="{96a37e31-9f3d-6022-008c-24627bc54aff}">
           <p14:sldIdLst>
             <p14:sldId id="282"/>
           </p14:sldIdLst>
@@ -3806,7 +3806,7 @@
                   <a:srgbClr val="FFFFFF"/>
                 </a:solidFill>
               </a:rPr>
-              <a:t>MODULE 25 / 29</a:t>
+              <a:t>MODULE 25 / 32</a:t>
             </a:r>
             <a:endParaRPr lang="en-US" sz="1400" dirty="0"/>
           </a:p>

--- a/neerlandais1/powerpoints/Module_25_Hoe_laat_is_het.pptx
+++ b/neerlandais1/powerpoints/Module_25_Hoe_laat_is_het.pptx
@@ -133,18 +133,18 @@
   <p:extLst>
     <p:ext uri="{521415D9-36F7-43E2-AB2F-B90AF26B5E84}">
       <p14:sectionLst xmlns:p14="http://schemas.microsoft.com/office/powerpoint/2010/main">
-        <p14:section name="Ouverture" id="{4eccafea-c5da-2288-8da4-b45af3140601}">
+        <p14:section name="Ouverture" id="{f09f2428-889a-ae6f-df28-93159efa0627}">
           <p14:sldIdLst>
             <p14:sldId id="256"/>
           </p14:sldIdLst>
         </p14:section>
-        <p14:section name="Découvrir" id="{d1097d02-e216-d6a8-a5a2-26b944dd711c}">
+        <p14:section name="Découvrir" id="{b0b5f620-58c9-b218-0030-9f44ab5c7c63}">
           <p14:sldIdLst>
             <p14:sldId id="257"/>
             <p14:sldId id="258"/>
           </p14:sldIdLst>
         </p14:section>
-        <p14:section name="Comprendre" id="{fbad819d-4b1b-0b69-c265-ccb56eb36d7b}">
+        <p14:section name="Comprendre" id="{9e7149fb-e5bf-f4da-29bf-b22dfb73f569}">
           <p14:sldIdLst>
             <p14:sldId id="259"/>
             <p14:sldId id="260"/>
@@ -158,7 +158,7 @@
             <p14:sldId id="268"/>
           </p14:sldIdLst>
         </p14:section>
-        <p14:section name="JIJ NU ! — Oefeningen" id="{bb01c3bd-0461-9990-82b1-63dc9dbf39d9}">
+        <p14:section name="JIJ NU ! — Oefeningen" id="{9cb24e13-089a-ccb9-f5f1-f1d097315946}">
           <p14:sldIdLst>
             <p14:sldId id="269"/>
             <p14:sldId id="270"/>
@@ -175,7 +175,7 @@
             <p14:sldId id="281"/>
           </p14:sldIdLst>
         </p14:section>
-        <p14:section name="Clôture" id="{96a37e31-9f3d-6022-008c-24627bc54aff}">
+        <p14:section name="Clôture" id="{643cba23-7f45-fe35-ec85-41c4d2fd6e5d}">
           <p14:sldIdLst>
             <p14:sldId id="282"/>
           </p14:sldIdLst>

--- a/neerlandais1/powerpoints/Module_25_Hoe_laat_is_het.pptx
+++ b/neerlandais1/powerpoints/Module_25_Hoe_laat_is_het.pptx
@@ -133,18 +133,18 @@
   <p:extLst>
     <p:ext uri="{521415D9-36F7-43E2-AB2F-B90AF26B5E84}">
       <p14:sectionLst xmlns:p14="http://schemas.microsoft.com/office/powerpoint/2010/main">
-        <p14:section name="Ouverture" id="{f09f2428-889a-ae6f-df28-93159efa0627}">
+        <p14:section name="Ouverture" id="{03781869-d2c1-bd9a-66bd-4e978607f72c}">
           <p14:sldIdLst>
             <p14:sldId id="256"/>
           </p14:sldIdLst>
         </p14:section>
-        <p14:section name="Découvrir" id="{b0b5f620-58c9-b218-0030-9f44ab5c7c63}">
+        <p14:section name="Découvrir" id="{35bf7210-ca20-6b4d-7695-a05cf5b89923}">
           <p14:sldIdLst>
             <p14:sldId id="257"/>
             <p14:sldId id="258"/>
           </p14:sldIdLst>
         </p14:section>
-        <p14:section name="Comprendre" id="{9e7149fb-e5bf-f4da-29bf-b22dfb73f569}">
+        <p14:section name="Comprendre" id="{3d3c66e8-4118-94a8-0495-58bceaed9982}">
           <p14:sldIdLst>
             <p14:sldId id="259"/>
             <p14:sldId id="260"/>
@@ -158,7 +158,7 @@
             <p14:sldId id="268"/>
           </p14:sldIdLst>
         </p14:section>
-        <p14:section name="JIJ NU ! — Oefeningen" id="{9cb24e13-089a-ccb9-f5f1-f1d097315946}">
+        <p14:section name="JIJ NU ! — Oefeningen" id="{dfbe8699-7322-e487-7a47-893f75b84fbd}">
           <p14:sldIdLst>
             <p14:sldId id="269"/>
             <p14:sldId id="270"/>
@@ -175,7 +175,7 @@
             <p14:sldId id="281"/>
           </p14:sldIdLst>
         </p14:section>
-        <p14:section name="Clôture" id="{643cba23-7f45-fe35-ec85-41c4d2fd6e5d}">
+        <p14:section name="Clôture" id="{3c9c4359-1b7e-5498-3660-c7d1c0541642}">
           <p14:sldIdLst>
             <p14:sldId id="282"/>
           </p14:sldIdLst>

--- a/neerlandais1/powerpoints/Module_25_Hoe_laat_is_het.pptx
+++ b/neerlandais1/powerpoints/Module_25_Hoe_laat_is_het.pptx
@@ -133,18 +133,18 @@
   <p:extLst>
     <p:ext uri="{521415D9-36F7-43E2-AB2F-B90AF26B5E84}">
       <p14:sectionLst xmlns:p14="http://schemas.microsoft.com/office/powerpoint/2010/main">
-        <p14:section name="Ouverture" id="{03781869-d2c1-bd9a-66bd-4e978607f72c}">
+        <p14:section name="Ouverture" id="{5c68d713-5ee8-36e8-5fd6-36f3d5299a0b}">
           <p14:sldIdLst>
             <p14:sldId id="256"/>
           </p14:sldIdLst>
         </p14:section>
-        <p14:section name="Découvrir" id="{35bf7210-ca20-6b4d-7695-a05cf5b89923}">
+        <p14:section name="Découvrir" id="{5529080a-fd93-3087-5e0f-474629021ce6}">
           <p14:sldIdLst>
             <p14:sldId id="257"/>
             <p14:sldId id="258"/>
           </p14:sldIdLst>
         </p14:section>
-        <p14:section name="Comprendre" id="{3d3c66e8-4118-94a8-0495-58bceaed9982}">
+        <p14:section name="Comprendre" id="{5bbf2c40-45d2-d6ab-2240-d57cdb50af4e}">
           <p14:sldIdLst>
             <p14:sldId id="259"/>
             <p14:sldId id="260"/>
@@ -158,7 +158,7 @@
             <p14:sldId id="268"/>
           </p14:sldIdLst>
         </p14:section>
-        <p14:section name="JIJ NU ! — Oefeningen" id="{dfbe8699-7322-e487-7a47-893f75b84fbd}">
+        <p14:section name="JIJ NU ! — Oefeningen" id="{0b0ae8e5-bc8d-78c4-a880-a167f7a9806a}">
           <p14:sldIdLst>
             <p14:sldId id="269"/>
             <p14:sldId id="270"/>
@@ -175,7 +175,7 @@
             <p14:sldId id="281"/>
           </p14:sldIdLst>
         </p14:section>
-        <p14:section name="Clôture" id="{3c9c4359-1b7e-5498-3660-c7d1c0541642}">
+        <p14:section name="Clôture" id="{801e75ee-df53-f85a-69ec-5b67b77e6a6a}">
           <p14:sldIdLst>
             <p14:sldId id="282"/>
           </p14:sldIdLst>

--- a/neerlandais1/powerpoints/Module_25_Hoe_laat_is_het.pptx
+++ b/neerlandais1/powerpoints/Module_25_Hoe_laat_is_het.pptx
@@ -133,18 +133,18 @@
   <p:extLst>
     <p:ext uri="{521415D9-36F7-43E2-AB2F-B90AF26B5E84}">
       <p14:sectionLst xmlns:p14="http://schemas.microsoft.com/office/powerpoint/2010/main">
-        <p14:section name="Ouverture" id="{5c68d713-5ee8-36e8-5fd6-36f3d5299a0b}">
+        <p14:section name="Ouverture" id="{c89fa658-472c-4451-3d04-d3f594f40081}">
           <p14:sldIdLst>
             <p14:sldId id="256"/>
           </p14:sldIdLst>
         </p14:section>
-        <p14:section name="Découvrir" id="{5529080a-fd93-3087-5e0f-474629021ce6}">
+        <p14:section name="Découvrir" id="{a42bd903-388c-2e5b-9bb9-cb1c721c187c}">
           <p14:sldIdLst>
             <p14:sldId id="257"/>
             <p14:sldId id="258"/>
           </p14:sldIdLst>
         </p14:section>
-        <p14:section name="Comprendre" id="{5bbf2c40-45d2-d6ab-2240-d57cdb50af4e}">
+        <p14:section name="Comprendre" id="{dd59d1ca-0484-d499-df64-c6381d7c88f5}">
           <p14:sldIdLst>
             <p14:sldId id="259"/>
             <p14:sldId id="260"/>
@@ -158,7 +158,7 @@
             <p14:sldId id="268"/>
           </p14:sldIdLst>
         </p14:section>
-        <p14:section name="JIJ NU ! — Oefeningen" id="{0b0ae8e5-bc8d-78c4-a880-a167f7a9806a}">
+        <p14:section name="JIJ NU ! — Oefeningen" id="{9b9439f4-89a4-ecc3-acd8-753ec0ab919b}">
           <p14:sldIdLst>
             <p14:sldId id="269"/>
             <p14:sldId id="270"/>
@@ -175,7 +175,7 @@
             <p14:sldId id="281"/>
           </p14:sldIdLst>
         </p14:section>
-        <p14:section name="Clôture" id="{801e75ee-df53-f85a-69ec-5b67b77e6a6a}">
+        <p14:section name="Clôture" id="{85abc438-a9d6-eb02-704a-0d01b09b8498}">
           <p14:sldIdLst>
             <p14:sldId id="282"/>
           </p14:sldIdLst>

--- a/neerlandais1/powerpoints/Module_25_Hoe_laat_is_het.pptx
+++ b/neerlandais1/powerpoints/Module_25_Hoe_laat_is_het.pptx
@@ -133,18 +133,18 @@
   <p:extLst>
     <p:ext uri="{521415D9-36F7-43E2-AB2F-B90AF26B5E84}">
       <p14:sectionLst xmlns:p14="http://schemas.microsoft.com/office/powerpoint/2010/main">
-        <p14:section name="Ouverture" id="{c89fa658-472c-4451-3d04-d3f594f40081}">
+        <p14:section name="Ouverture" id="{35b8002f-f8c7-fa17-52cc-9fd9a9f18b05}">
           <p14:sldIdLst>
             <p14:sldId id="256"/>
           </p14:sldIdLst>
         </p14:section>
-        <p14:section name="Découvrir" id="{a42bd903-388c-2e5b-9bb9-cb1c721c187c}">
+        <p14:section name="Découvrir" id="{2144ae56-3313-e24a-74c8-e7fa42526f13}">
           <p14:sldIdLst>
             <p14:sldId id="257"/>
             <p14:sldId id="258"/>
           </p14:sldIdLst>
         </p14:section>
-        <p14:section name="Comprendre" id="{dd59d1ca-0484-d499-df64-c6381d7c88f5}">
+        <p14:section name="Comprendre" id="{684d90d1-6bf1-eb99-3e9d-00bccee0b251}">
           <p14:sldIdLst>
             <p14:sldId id="259"/>
             <p14:sldId id="260"/>
@@ -158,7 +158,7 @@
             <p14:sldId id="268"/>
           </p14:sldIdLst>
         </p14:section>
-        <p14:section name="JIJ NU ! — Oefeningen" id="{9b9439f4-89a4-ecc3-acd8-753ec0ab919b}">
+        <p14:section name="JIJ NU ! — Oefeningen" id="{79dc3eb0-5a03-fbc5-c426-9b0e604d723e}">
           <p14:sldIdLst>
             <p14:sldId id="269"/>
             <p14:sldId id="270"/>
@@ -175,7 +175,7 @@
             <p14:sldId id="281"/>
           </p14:sldIdLst>
         </p14:section>
-        <p14:section name="Clôture" id="{85abc438-a9d6-eb02-704a-0d01b09b8498}">
+        <p14:section name="Clôture" id="{776fa23d-572b-c8a3-2232-21dd2e39cd55}">
           <p14:sldIdLst>
             <p14:sldId id="282"/>
           </p14:sldIdLst>

--- a/neerlandais1/powerpoints/Module_25_Hoe_laat_is_het.pptx
+++ b/neerlandais1/powerpoints/Module_25_Hoe_laat_is_het.pptx
@@ -133,18 +133,18 @@
   <p:extLst>
     <p:ext uri="{521415D9-36F7-43E2-AB2F-B90AF26B5E84}">
       <p14:sectionLst xmlns:p14="http://schemas.microsoft.com/office/powerpoint/2010/main">
-        <p14:section name="Ouverture" id="{35b8002f-f8c7-fa17-52cc-9fd9a9f18b05}">
+        <p14:section name="Ouverture" id="{39841a37-0375-a5b0-779a-595fd0df15d2}">
           <p14:sldIdLst>
             <p14:sldId id="256"/>
           </p14:sldIdLst>
         </p14:section>
-        <p14:section name="Découvrir" id="{2144ae56-3313-e24a-74c8-e7fa42526f13}">
+        <p14:section name="Découvrir" id="{4097671c-af98-b135-f9dc-a2a33606c9a4}">
           <p14:sldIdLst>
             <p14:sldId id="257"/>
             <p14:sldId id="258"/>
           </p14:sldIdLst>
         </p14:section>
-        <p14:section name="Comprendre" id="{684d90d1-6bf1-eb99-3e9d-00bccee0b251}">
+        <p14:section name="Comprendre" id="{d4bf28d4-7739-9794-8697-630b33769dc7}">
           <p14:sldIdLst>
             <p14:sldId id="259"/>
             <p14:sldId id="260"/>
@@ -158,7 +158,7 @@
             <p14:sldId id="268"/>
           </p14:sldIdLst>
         </p14:section>
-        <p14:section name="JIJ NU ! — Oefeningen" id="{79dc3eb0-5a03-fbc5-c426-9b0e604d723e}">
+        <p14:section name="JIJ NU ! — Oefeningen" id="{73d5d5a4-19dd-312c-616f-7327a60dc116}">
           <p14:sldIdLst>
             <p14:sldId id="269"/>
             <p14:sldId id="270"/>
@@ -175,7 +175,7 @@
             <p14:sldId id="281"/>
           </p14:sldIdLst>
         </p14:section>
-        <p14:section name="Clôture" id="{776fa23d-572b-c8a3-2232-21dd2e39cd55}">
+        <p14:section name="Clôture" id="{56f80e84-a471-b862-3c77-19be54330fec}">
           <p14:sldIdLst>
             <p14:sldId id="282"/>
           </p14:sldIdLst>

--- a/neerlandais1/powerpoints/Module_25_Hoe_laat_is_het.pptx
+++ b/neerlandais1/powerpoints/Module_25_Hoe_laat_is_het.pptx
@@ -133,18 +133,18 @@
   <p:extLst>
     <p:ext uri="{521415D9-36F7-43E2-AB2F-B90AF26B5E84}">
       <p14:sectionLst xmlns:p14="http://schemas.microsoft.com/office/powerpoint/2010/main">
-        <p14:section name="Ouverture" id="{39841a37-0375-a5b0-779a-595fd0df15d2}">
+        <p14:section name="Ouverture" id="{9e0bea3d-e75b-d88c-08c2-10efd02fdd63}">
           <p14:sldIdLst>
             <p14:sldId id="256"/>
           </p14:sldIdLst>
         </p14:section>
-        <p14:section name="Découvrir" id="{4097671c-af98-b135-f9dc-a2a33606c9a4}">
+        <p14:section name="Découvrir" id="{ae26846e-6278-8fc6-6272-a5f7256416a9}">
           <p14:sldIdLst>
             <p14:sldId id="257"/>
             <p14:sldId id="258"/>
           </p14:sldIdLst>
         </p14:section>
-        <p14:section name="Comprendre" id="{d4bf28d4-7739-9794-8697-630b33769dc7}">
+        <p14:section name="Comprendre" id="{b5fc2b51-fd4c-8720-60a6-ef2471907c55}">
           <p14:sldIdLst>
             <p14:sldId id="259"/>
             <p14:sldId id="260"/>
@@ -158,7 +158,7 @@
             <p14:sldId id="268"/>
           </p14:sldIdLst>
         </p14:section>
-        <p14:section name="JIJ NU ! — Oefeningen" id="{73d5d5a4-19dd-312c-616f-7327a60dc116}">
+        <p14:section name="JIJ NU ! — Oefeningen" id="{a76d2c6e-86da-0b20-87c7-3f22fe0559eb}">
           <p14:sldIdLst>
             <p14:sldId id="269"/>
             <p14:sldId id="270"/>
@@ -175,7 +175,7 @@
             <p14:sldId id="281"/>
           </p14:sldIdLst>
         </p14:section>
-        <p14:section name="Clôture" id="{56f80e84-a471-b862-3c77-19be54330fec}">
+        <p14:section name="Clôture" id="{7b6d5c80-f433-6f2c-f86b-7792f6b126b0}">
           <p14:sldIdLst>
             <p14:sldId id="282"/>
           </p14:sldIdLst>

--- a/neerlandais1/powerpoints/Module_25_Hoe_laat_is_het.pptx
+++ b/neerlandais1/powerpoints/Module_25_Hoe_laat_is_het.pptx
@@ -133,18 +133,18 @@
   <p:extLst>
     <p:ext uri="{521415D9-36F7-43E2-AB2F-B90AF26B5E84}">
       <p14:sectionLst xmlns:p14="http://schemas.microsoft.com/office/powerpoint/2010/main">
-        <p14:section name="Ouverture" id="{9e0bea3d-e75b-d88c-08c2-10efd02fdd63}">
+        <p14:section name="Ouverture" id="{9392a7fb-c309-db6e-1b86-785960d3621b}">
           <p14:sldIdLst>
             <p14:sldId id="256"/>
           </p14:sldIdLst>
         </p14:section>
-        <p14:section name="Découvrir" id="{ae26846e-6278-8fc6-6272-a5f7256416a9}">
+        <p14:section name="Découvrir" id="{560bbea8-5c36-2606-b073-00c1d863b022}">
           <p14:sldIdLst>
             <p14:sldId id="257"/>
             <p14:sldId id="258"/>
           </p14:sldIdLst>
         </p14:section>
-        <p14:section name="Comprendre" id="{b5fc2b51-fd4c-8720-60a6-ef2471907c55}">
+        <p14:section name="Comprendre" id="{f86339a1-f613-fc8d-a9a3-bf9a20efa11b}">
           <p14:sldIdLst>
             <p14:sldId id="259"/>
             <p14:sldId id="260"/>
@@ -158,7 +158,7 @@
             <p14:sldId id="268"/>
           </p14:sldIdLst>
         </p14:section>
-        <p14:section name="JIJ NU ! — Oefeningen" id="{a76d2c6e-86da-0b20-87c7-3f22fe0559eb}">
+        <p14:section name="JIJ NU ! — Oefeningen" id="{5775630a-3d2a-ad0f-b3fe-63c3731b7e0f}">
           <p14:sldIdLst>
             <p14:sldId id="269"/>
             <p14:sldId id="270"/>
@@ -175,7 +175,7 @@
             <p14:sldId id="281"/>
           </p14:sldIdLst>
         </p14:section>
-        <p14:section name="Clôture" id="{7b6d5c80-f433-6f2c-f86b-7792f6b126b0}">
+        <p14:section name="Clôture" id="{eac60a48-1ab5-7c10-54ab-9ec3fc95fe73}">
           <p14:sldIdLst>
             <p14:sldId id="282"/>
           </p14:sldIdLst>
